--- a/10-plantas/01-steelmaking/05-capacitacion/MS-ACE-05/MS-ACE-05_Capacitacion_AMMX.pptx
+++ b/10-plantas/01-steelmaking/05-capacitacion/MS-ACE-05/MS-ACE-05_Capacitacion_AMMX.pptx
@@ -5835,7 +5835,7 @@
                           <a:ea typeface="Century Gothic" pitchFamily="34" charset="-122"/>
                           <a:cs typeface="Century Gothic" pitchFamily="34" charset="-120"/>
                         </a:rPr>
-                        <a:t>50–150 NL/min (suave)</a:t>
+                        <a:t>Tapón 100–200 NL/min (MM-OLL-01)</a:t>
                       </a:r>
                       <a:endParaRPr lang="en-US" sz="1050" dirty="0">
                         <a:latin typeface="Century Gothic" charset="0"/>
@@ -16544,7 +16544,7 @@
                 <a:ea typeface="Century Gothic" pitchFamily="34" charset="-122"/>
                 <a:cs typeface="Century Gothic" pitchFamily="34" charset="-120"/>
               </a:rPr>
-              <a:t>Aplica los límites: O₂ 19.5–23.5 %, &lt; 10 % LEL, CO &lt; 25 ppm; caliente ≤ 1 % LEL</a:t>
+              <a:t>Aplica límites: O₂ 19.5–23.5 %, CO &lt; 25 ppm; entra &lt; 10 % LEL, caliente ≤ 1 %, evacúa ≥ 20 %</a:t>
             </a:r>
             <a:endParaRPr lang="en-US" sz="1050" dirty="0"/>
           </a:p>
@@ -19350,7 +19350,7 @@
                 <a:ea typeface="Calibri" pitchFamily="34" charset="-122"/>
                 <a:cs typeface="Calibri" pitchFamily="34" charset="-120"/>
               </a:rPr>
-              <a:t>Siguiente paso: OJT supervisado y evaluación práctica (TD-P07); registro en IMaS y DC-3/SIRCE. Validación: visto bueno seguridad (pendientes: técnica, laboral, diseño instruccional).</a:t>
+              <a:t>Siguiente paso: OJT supervisado y evaluación práctica (TD-P07); registro en IMaS y DC-3/SIRCE. Validación: visto bueno técnica, seguridad, laboral, diseño instruccional.</a:t>
             </a:r>
             <a:endParaRPr lang="en-US" sz="750" dirty="0"/>
           </a:p>
@@ -20356,7 +20356,7 @@
                 <a:ea typeface="Century Gothic" pitchFamily="34" charset="-122"/>
                 <a:cs typeface="Century Gothic" pitchFamily="34" charset="-120"/>
               </a:rPr>
-              <a:t>Reconocer el espacio y su peligro</a:t>
+              <a:t>Identificar el espacio y su peligro</a:t>
             </a:r>
             <a:endParaRPr lang="en-US" sz="1350" dirty="0"/>
           </a:p>
@@ -22055,7 +22055,7 @@
                           <a:ea typeface="Century Gothic" pitchFamily="34" charset="-122"/>
                           <a:cs typeface="Century Gothic" pitchFamily="34" charset="-120"/>
                         </a:rPr>
-                        <a:t>Se queda afuera todo el tiempo; controla entradas; activa rescate</a:t>
+                        <a:t>Se queda afuera todo el tiempo; registra entradas; activa rescate</a:t>
                       </a:r>
                       <a:endParaRPr lang="en-US" sz="1100" dirty="0">
                         <a:latin typeface="Century Gothic" charset="0"/>
